--- a/dist/초3/국어/읽기와어휘/초3_국어_읽기와어휘_02_문맥으로낱말뜻짐작.pptx
+++ b/dist/초3/국어/읽기와어휘/초3_국어_읽기와어휘_02_문맥으로낱말뜻짐작.pptx
@@ -119,39 +119,39 @@
   <p:extLst>
     <p:ext uri="{521415D9-36F7-43E2-AB2F-B90AF26B5E84}">
       <p14:sectionLst xmlns:p14="http://schemas.microsoft.com/office/powerpoint/2010/main">
-        <p14:section name="도입" id="{0e2f4256-bd6f-42fb-e7b1-4e610edbae3a}">
+        <p14:section name="도입" id="{01d7395e-7bb2-f9db-1a06-b9e2f52cd3d6}">
           <p14:sldIdLst>
             <p14:sldId id="256"/>
             <p14:sldId id="257"/>
           </p14:sldIdLst>
         </p14:section>
-        <p14:section name="개념" id="{0833e59e-dbff-ad36-beee-e803aef0aec3}">
+        <p14:section name="개념" id="{e220d3e2-aba3-8a9e-b7bb-a296de61aa68}">
           <p14:sldIdLst>
             <p14:sldId id="258"/>
             <p14:sldId id="259"/>
             <p14:sldId id="260"/>
           </p14:sldIdLst>
         </p14:section>
-        <p14:section name="연습" id="{9ac5acd3-7cc7-12f3-cb35-55bf2b17be6c}">
+        <p14:section name="연습" id="{bd62f4c3-70ed-021a-fa0f-106f10df056c}">
           <p14:sldIdLst>
             <p14:sldId id="261"/>
             <p14:sldId id="262"/>
             <p14:sldId id="263"/>
           </p14:sldIdLst>
         </p14:section>
-        <p14:section name="확인" id="{a1fa4911-d94c-f18d-f2d7-789d11bb0552}">
+        <p14:section name="확인" id="{74b3bba2-da74-7564-2fd4-6f49e3251c49}">
           <p14:sldIdLst>
             <p14:sldId id="264"/>
             <p14:sldId id="265"/>
             <p14:sldId id="266"/>
           </p14:sldIdLst>
         </p14:section>
-        <p14:section name="정리" id="{5713d4b0-4eef-9324-0484-34888c63dcd5}">
+        <p14:section name="정리" id="{d5729d29-4d28-0ed8-8393-b60e16ca4928}">
           <p14:sldIdLst>
             <p14:sldId id="267"/>
           </p14:sldIdLst>
         </p14:section>
-        <p14:section name="보충" id="{2e8523f0-0e05-a7a2-740d-30e08d6e944b}">
+        <p14:section name="보충" id="{40c3eb54-a6a7-de99-ca7f-48daac36b9d2}">
           <p14:sldIdLst>
             <p14:sldId id="268"/>
           </p14:sldIdLst>
@@ -2857,7 +2857,7 @@
           <a:bodyPr wrap="square" lIns="0" tIns="0" rIns="0" bIns="0" rtlCol="0" anchor="ctr"/>
           <a:lstStyle/>
           <a:p>
-            <a:pPr algn="l" indent="0" marL="0">
+            <a:pPr eaLnBrk="0" algn="l" indent="0" marL="0">
               <a:buNone/>
             </a:pPr>
             <a:r>
@@ -2898,7 +2898,7 @@
           <a:bodyPr wrap="square" lIns="0" tIns="0" rIns="0" bIns="0" rtlCol="0" anchor="t"/>
           <a:lstStyle/>
           <a:p>
-            <a:pPr indent="0" marL="0">
+            <a:pPr eaLnBrk="0" indent="0" marL="0">
               <a:buNone/>
             </a:pPr>
             <a:r>
@@ -2964,7 +2964,7 @@
           <a:bodyPr wrap="square" lIns="0" tIns="0" rIns="0" bIns="0" rtlCol="0" anchor="ctr"/>
           <a:lstStyle/>
           <a:p>
-            <a:pPr indent="0" marL="0">
+            <a:pPr eaLnBrk="0" indent="0" marL="0">
               <a:spcAft>
                 <a:spcPts val="600"/>
               </a:spcAft>
@@ -2984,7 +2984,7 @@
             <a:endParaRPr lang="ko-KR" sz="3000" dirty="0"/>
           </a:p>
           <a:p>
-            <a:pPr indent="0" marL="0">
+            <a:pPr eaLnBrk="0" indent="0" marL="0">
               <a:spcAft>
                 <a:spcPts val="600"/>
               </a:spcAft>
@@ -3004,7 +3004,7 @@
             <a:endParaRPr lang="ko-KR" sz="3000" dirty="0"/>
           </a:p>
           <a:p>
-            <a:pPr indent="0" marL="0">
+            <a:pPr eaLnBrk="0" indent="0" marL="0">
               <a:spcAft>
                 <a:spcPts val="600"/>
               </a:spcAft>
@@ -3073,7 +3073,7 @@
           <a:bodyPr wrap="square" lIns="0" tIns="0" rIns="0" bIns="0" rtlCol="0" anchor="ctr"/>
           <a:lstStyle/>
           <a:p>
-            <a:pPr algn="l" indent="0" marL="0">
+            <a:pPr eaLnBrk="0" algn="l" indent="0" marL="0">
               <a:buNone/>
             </a:pPr>
             <a:r>
@@ -3139,7 +3139,7 @@
           <a:bodyPr wrap="square" lIns="0" tIns="0" rIns="0" bIns="0" rtlCol="0" anchor="ctr"/>
           <a:lstStyle/>
           <a:p>
-            <a:pPr indent="0" marL="0">
+            <a:pPr eaLnBrk="0" indent="0" marL="0">
               <a:spcAft>
                 <a:spcPts val="600"/>
               </a:spcAft>
@@ -3189,7 +3189,7 @@
           <a:bodyPr wrap="square" lIns="177800" tIns="0" rIns="177800" bIns="0" rtlCol="0" anchor="ctr"/>
           <a:lstStyle/>
           <a:p>
-            <a:pPr algn="l" indent="0" marL="0">
+            <a:pPr eaLnBrk="0" algn="l" indent="0" marL="0">
               <a:buNone/>
             </a:pPr>
             <a:r>
@@ -3228,7 +3228,7 @@
           <a:bodyPr wrap="square" lIns="0" tIns="0" rIns="0" bIns="0" rtlCol="0" anchor="ctr"/>
           <a:lstStyle/>
           <a:p>
-            <a:pPr algn="l" indent="0" marL="0">
+            <a:pPr eaLnBrk="0" algn="l" indent="0" marL="0">
               <a:buNone/>
             </a:pPr>
             <a:r>
@@ -3245,7 +3245,7 @@
             <a:endParaRPr lang="ko-KR" sz="3000" dirty="0"/>
           </a:p>
           <a:p>
-            <a:pPr algn="l" indent="0" marL="0">
+            <a:pPr eaLnBrk="0" algn="l" indent="0" marL="0">
               <a:buNone/>
             </a:pPr>
             <a:r>
@@ -3284,7 +3284,7 @@
           <a:bodyPr wrap="square" lIns="0" tIns="0" rIns="0" bIns="0" rtlCol="0" anchor="ctr"/>
           <a:lstStyle/>
           <a:p>
-            <a:pPr algn="l" indent="0" marL="0">
+            <a:pPr eaLnBrk="0" algn="l" indent="0" marL="0">
               <a:buNone/>
             </a:pPr>
             <a:r>
@@ -3301,7 +3301,7 @@
             <a:endParaRPr lang="ko-KR" sz="2400" dirty="0"/>
           </a:p>
           <a:p>
-            <a:pPr algn="l" indent="0" marL="0">
+            <a:pPr eaLnBrk="0" algn="l" indent="0" marL="0">
               <a:buNone/>
             </a:pPr>
             <a:r>
@@ -3348,7 +3348,7 @@
           <a:bodyPr wrap="square" lIns="177800" tIns="0" rIns="177800" bIns="0" rtlCol="0" anchor="ctr"/>
           <a:lstStyle/>
           <a:p>
-            <a:pPr algn="l" indent="0" marL="0">
+            <a:pPr eaLnBrk="0" algn="l" indent="0" marL="0">
               <a:buNone/>
             </a:pPr>
             <a:r>
@@ -3387,7 +3387,7 @@
           <a:bodyPr wrap="square" lIns="0" tIns="0" rIns="0" bIns="0" rtlCol="0" anchor="ctr"/>
           <a:lstStyle/>
           <a:p>
-            <a:pPr algn="l" indent="0" marL="0">
+            <a:pPr eaLnBrk="0" algn="l" indent="0" marL="0">
               <a:buNone/>
             </a:pPr>
             <a:r>
@@ -3404,7 +3404,7 @@
             <a:endParaRPr lang="ko-KR" sz="3000" dirty="0"/>
           </a:p>
           <a:p>
-            <a:pPr algn="l" indent="0" marL="0">
+            <a:pPr eaLnBrk="0" algn="l" indent="0" marL="0">
               <a:buNone/>
             </a:pPr>
             <a:r>
@@ -3443,7 +3443,7 @@
           <a:bodyPr wrap="square" lIns="0" tIns="0" rIns="0" bIns="0" rtlCol="0" anchor="ctr"/>
           <a:lstStyle/>
           <a:p>
-            <a:pPr algn="l" indent="0" marL="0">
+            <a:pPr eaLnBrk="0" algn="l" indent="0" marL="0">
               <a:buNone/>
             </a:pPr>
             <a:r>
@@ -3460,7 +3460,7 @@
             <a:endParaRPr lang="ko-KR" sz="2400" dirty="0"/>
           </a:p>
           <a:p>
-            <a:pPr algn="l" indent="0" marL="0">
+            <a:pPr eaLnBrk="0" algn="l" indent="0" marL="0">
               <a:buNone/>
             </a:pPr>
             <a:r>
@@ -3517,7 +3517,7 @@
             </a:lvl1pPr>
           </a:lstStyle>
           <a:p>
-            <a:pPr algn="r"/>
+            <a:pPr eaLnBrk="0" algn="r"/>
             <a:fld id="{F7021451-1387-4CA6-816F-3879F97B5CBC}" type="slidenum">
               <a:rPr b="0" lang="en-US"/>
               <a:t>10</a:t>
@@ -3574,7 +3574,7 @@
           <a:bodyPr wrap="square" lIns="0" tIns="0" rIns="0" bIns="0" rtlCol="0" anchor="ctr"/>
           <a:lstStyle/>
           <a:p>
-            <a:pPr algn="l" indent="0" marL="0">
+            <a:pPr eaLnBrk="0" algn="l" indent="0" marL="0">
               <a:buNone/>
             </a:pPr>
             <a:r>
@@ -3613,7 +3613,7 @@
           <a:bodyPr wrap="square" lIns="0" tIns="0" rIns="0" bIns="0" rtlCol="0" anchor="ctr"/>
           <a:lstStyle/>
           <a:p>
-            <a:pPr algn="l" indent="0" marL="0">
+            <a:pPr eaLnBrk="0" algn="l" indent="0" marL="0">
               <a:buNone/>
             </a:pPr>
             <a:r>
@@ -3679,7 +3679,7 @@
           <a:bodyPr wrap="square" lIns="0" tIns="0" rIns="0" bIns="0" rtlCol="0" anchor="ctr"/>
           <a:lstStyle/>
           <a:p>
-            <a:pPr indent="0" marL="0">
+            <a:pPr eaLnBrk="0" indent="0" marL="0">
               <a:spcAft>
                 <a:spcPts val="600"/>
               </a:spcAft>
@@ -3729,7 +3729,7 @@
           <a:bodyPr wrap="square" lIns="0" tIns="0" rIns="0" bIns="0" rtlCol="0" anchor="ctr"/>
           <a:lstStyle/>
           <a:p>
-            <a:pPr algn="ctr" indent="0" marL="0">
+            <a:pPr eaLnBrk="0" algn="ctr" indent="0" marL="0">
               <a:buNone/>
             </a:pPr>
             <a:r>
@@ -3795,7 +3795,7 @@
           <a:bodyPr wrap="square" lIns="0" tIns="0" rIns="0" bIns="0" rtlCol="0" anchor="ctr"/>
           <a:lstStyle/>
           <a:p>
-            <a:pPr indent="0" marL="0">
+            <a:pPr eaLnBrk="0" indent="0" marL="0">
               <a:spcAft>
                 <a:spcPts val="600"/>
               </a:spcAft>
@@ -3845,7 +3845,7 @@
           <a:bodyPr wrap="square" lIns="0" tIns="0" rIns="0" bIns="0" rtlCol="0" anchor="ctr"/>
           <a:lstStyle/>
           <a:p>
-            <a:pPr algn="ctr" indent="0" marL="0">
+            <a:pPr eaLnBrk="0" algn="ctr" indent="0" marL="0">
               <a:buNone/>
             </a:pPr>
             <a:r>
@@ -3911,7 +3911,7 @@
           <a:bodyPr wrap="square" lIns="0" tIns="0" rIns="0" bIns="0" rtlCol="0" anchor="ctr"/>
           <a:lstStyle/>
           <a:p>
-            <a:pPr indent="0" marL="0">
+            <a:pPr eaLnBrk="0" indent="0" marL="0">
               <a:spcAft>
                 <a:spcPts val="600"/>
               </a:spcAft>
@@ -3961,7 +3961,7 @@
           <a:bodyPr wrap="square" lIns="0" tIns="0" rIns="0" bIns="0" rtlCol="0" anchor="ctr"/>
           <a:lstStyle/>
           <a:p>
-            <a:pPr algn="ctr" indent="0" marL="0">
+            <a:pPr eaLnBrk="0" algn="ctr" indent="0" marL="0">
               <a:buNone/>
             </a:pPr>
             <a:r>
@@ -4027,7 +4027,7 @@
           <a:bodyPr wrap="square" lIns="0" tIns="0" rIns="0" bIns="0" rtlCol="0" anchor="ctr"/>
           <a:lstStyle/>
           <a:p>
-            <a:pPr indent="0" marL="0">
+            <a:pPr eaLnBrk="0" indent="0" marL="0">
               <a:spcAft>
                 <a:spcPts val="600"/>
               </a:spcAft>
@@ -4087,7 +4087,7 @@
             </a:lvl1pPr>
           </a:lstStyle>
           <a:p>
-            <a:pPr algn="r"/>
+            <a:pPr eaLnBrk="0" algn="r"/>
             <a:fld id="{F7021451-1387-4CA6-816F-3879F97B5CBC}" type="slidenum">
               <a:rPr b="0" lang="en-US"/>
               <a:t>11</a:t>
@@ -4144,7 +4144,7 @@
           <a:bodyPr wrap="square" lIns="0" tIns="0" rIns="0" bIns="0" rtlCol="0" anchor="ctr"/>
           <a:lstStyle/>
           <a:p>
-            <a:pPr algn="l" indent="0" marL="0">
+            <a:pPr eaLnBrk="0" algn="l" indent="0" marL="0">
               <a:buNone/>
             </a:pPr>
             <a:r>
@@ -4210,7 +4210,7 @@
           <a:bodyPr wrap="square" lIns="0" tIns="0" rIns="0" bIns="0" rtlCol="0" anchor="ctr"/>
           <a:lstStyle/>
           <a:p>
-            <a:pPr indent="0" marL="0">
+            <a:pPr eaLnBrk="0" indent="0" marL="0">
               <a:spcAft>
                 <a:spcPts val="600"/>
               </a:spcAft>
@@ -4260,7 +4260,7 @@
           <a:bodyPr wrap="square" lIns="177800" tIns="0" rIns="177800" bIns="0" rtlCol="0" anchor="ctr"/>
           <a:lstStyle/>
           <a:p>
-            <a:pPr algn="l" indent="0" marL="0">
+            <a:pPr eaLnBrk="0" algn="l" indent="0" marL="0">
               <a:buNone/>
             </a:pPr>
             <a:r>
@@ -4307,7 +4307,7 @@
           <a:bodyPr wrap="square" lIns="177800" tIns="0" rIns="177800" bIns="0" rtlCol="0" anchor="ctr"/>
           <a:lstStyle/>
           <a:p>
-            <a:pPr algn="l" indent="0" marL="0">
+            <a:pPr eaLnBrk="0" algn="l" indent="0" marL="0">
               <a:buNone/>
             </a:pPr>
             <a:r>
@@ -4346,7 +4346,7 @@
           <a:bodyPr wrap="square" lIns="0" tIns="0" rIns="0" bIns="0" rtlCol="0" anchor="t"/>
           <a:lstStyle/>
           <a:p>
-            <a:pPr algn="l" indent="0" marL="0">
+            <a:pPr eaLnBrk="0" algn="l" indent="0" marL="0">
               <a:buNone/>
             </a:pPr>
             <a:r>
@@ -4385,7 +4385,7 @@
           <a:bodyPr wrap="square" lIns="0" tIns="0" rIns="0" bIns="0" rtlCol="0" anchor="ctr"/>
           <a:lstStyle/>
           <a:p>
-            <a:pPr algn="l" indent="0" marL="0">
+            <a:pPr eaLnBrk="0" algn="l" indent="0" marL="0">
               <a:buNone/>
             </a:pPr>
             <a:r>
@@ -4424,7 +4424,7 @@
           <a:bodyPr wrap="square" lIns="0" tIns="0" rIns="0" bIns="0" rtlCol="0" anchor="ctr"/>
           <a:lstStyle/>
           <a:p>
-            <a:pPr algn="l" indent="0" marL="0">
+            <a:pPr eaLnBrk="0" algn="l" indent="0" marL="0">
               <a:buNone/>
             </a:pPr>
             <a:r>
@@ -4463,7 +4463,7 @@
           <a:bodyPr wrap="square" lIns="0" tIns="0" rIns="0" bIns="0" rtlCol="0" anchor="ctr"/>
           <a:lstStyle/>
           <a:p>
-            <a:pPr algn="l" indent="0" marL="0">
+            <a:pPr eaLnBrk="0" algn="l" indent="0" marL="0">
               <a:buNone/>
             </a:pPr>
             <a:r>
@@ -4502,7 +4502,7 @@
           <a:bodyPr wrap="square" lIns="0" tIns="0" rIns="0" bIns="0" rtlCol="0" anchor="ctr"/>
           <a:lstStyle/>
           <a:p>
-            <a:pPr algn="l" indent="0" marL="0">
+            <a:pPr eaLnBrk="0" algn="l" indent="0" marL="0">
               <a:buNone/>
             </a:pPr>
             <a:r>
@@ -4559,7 +4559,7 @@
             </a:lvl1pPr>
           </a:lstStyle>
           <a:p>
-            <a:pPr algn="r"/>
+            <a:pPr eaLnBrk="0" algn="r"/>
             <a:fld id="{F7021451-1387-4CA6-816F-3879F97B5CBC}" type="slidenum">
               <a:rPr b="0" lang="en-US"/>
               <a:t>12</a:t>
@@ -4616,7 +4616,7 @@
           <a:bodyPr wrap="square" lIns="0" tIns="0" rIns="0" bIns="0" rtlCol="0" anchor="ctr"/>
           <a:lstStyle/>
           <a:p>
-            <a:pPr algn="l" indent="0" marL="0">
+            <a:pPr eaLnBrk="0" algn="l" indent="0" marL="0">
               <a:buNone/>
             </a:pPr>
             <a:r>
@@ -4655,7 +4655,7 @@
           <a:bodyPr wrap="square" lIns="0" tIns="0" rIns="0" bIns="0" rtlCol="0" anchor="ctr"/>
           <a:lstStyle/>
           <a:p>
-            <a:pPr algn="l" indent="0" marL="0">
+            <a:pPr eaLnBrk="0" algn="l" indent="0" marL="0">
               <a:buNone/>
             </a:pPr>
             <a:r>
@@ -4721,7 +4721,7 @@
           <a:bodyPr wrap="square" lIns="0" tIns="0" rIns="0" bIns="0" rtlCol="0" anchor="ctr"/>
           <a:lstStyle/>
           <a:p>
-            <a:pPr indent="0" marL="0">
+            <a:pPr eaLnBrk="0" indent="0" marL="0">
               <a:spcAft>
                 <a:spcPts val="600"/>
               </a:spcAft>
@@ -4771,7 +4771,7 @@
           <a:bodyPr wrap="square" lIns="0" tIns="0" rIns="0" bIns="0" rtlCol="0" anchor="ctr"/>
           <a:lstStyle/>
           <a:p>
-            <a:pPr algn="ctr" indent="0" marL="0">
+            <a:pPr eaLnBrk="0" algn="ctr" indent="0" marL="0">
               <a:buNone/>
             </a:pPr>
             <a:r>
@@ -4810,7 +4810,7 @@
           <a:bodyPr wrap="square" lIns="0" tIns="0" rIns="0" bIns="0" rtlCol="0" anchor="ctr"/>
           <a:lstStyle/>
           <a:p>
-            <a:pPr algn="l" indent="0" marL="0">
+            <a:pPr eaLnBrk="0" algn="l" indent="0" marL="0">
               <a:buNone/>
             </a:pPr>
             <a:r>
@@ -4857,7 +4857,7 @@
           <a:bodyPr wrap="square" lIns="0" tIns="0" rIns="0" bIns="0" rtlCol="0" anchor="ctr"/>
           <a:lstStyle/>
           <a:p>
-            <a:pPr algn="ctr" indent="0" marL="0">
+            <a:pPr eaLnBrk="0" algn="ctr" indent="0" marL="0">
               <a:buNone/>
             </a:pPr>
             <a:r>
@@ -4896,7 +4896,7 @@
           <a:bodyPr wrap="square" lIns="0" tIns="0" rIns="0" bIns="0" rtlCol="0" anchor="ctr"/>
           <a:lstStyle/>
           <a:p>
-            <a:pPr algn="l" indent="0" marL="0">
+            <a:pPr eaLnBrk="0" algn="l" indent="0" marL="0">
               <a:buNone/>
             </a:pPr>
             <a:r>
@@ -4943,7 +4943,7 @@
           <a:bodyPr wrap="square" lIns="0" tIns="0" rIns="0" bIns="0" rtlCol="0" anchor="ctr"/>
           <a:lstStyle/>
           <a:p>
-            <a:pPr algn="ctr" indent="0" marL="0">
+            <a:pPr eaLnBrk="0" algn="ctr" indent="0" marL="0">
               <a:buNone/>
             </a:pPr>
             <a:r>
@@ -4982,7 +4982,7 @@
           <a:bodyPr wrap="square" lIns="0" tIns="0" rIns="0" bIns="0" rtlCol="0" anchor="ctr"/>
           <a:lstStyle/>
           <a:p>
-            <a:pPr algn="l" indent="0" marL="0">
+            <a:pPr eaLnBrk="0" algn="l" indent="0" marL="0">
               <a:buNone/>
             </a:pPr>
             <a:r>
@@ -5039,7 +5039,7 @@
             </a:lvl1pPr>
           </a:lstStyle>
           <a:p>
-            <a:pPr algn="r"/>
+            <a:pPr eaLnBrk="0" algn="r"/>
             <a:fld id="{F7021451-1387-4CA6-816F-3879F97B5CBC}" type="slidenum">
               <a:rPr b="0" lang="en-US"/>
               <a:t>13</a:t>
@@ -5096,7 +5096,7 @@
           <a:bodyPr wrap="square" lIns="0" tIns="0" rIns="0" bIns="0" rtlCol="0" anchor="ctr"/>
           <a:lstStyle/>
           <a:p>
-            <a:pPr algn="l" indent="0" marL="0">
+            <a:pPr eaLnBrk="0" algn="l" indent="0" marL="0">
               <a:buNone/>
             </a:pPr>
             <a:r>
@@ -5162,7 +5162,7 @@
           <a:bodyPr wrap="square" lIns="0" tIns="0" rIns="0" bIns="0" rtlCol="0" anchor="ctr"/>
           <a:lstStyle/>
           <a:p>
-            <a:pPr indent="0" marL="0">
+            <a:pPr eaLnBrk="0" indent="0" marL="0">
               <a:spcAft>
                 <a:spcPts val="600"/>
               </a:spcAft>
@@ -5231,7 +5231,7 @@
           <a:bodyPr wrap="square" lIns="0" tIns="0" rIns="0" bIns="0" rtlCol="0" anchor="t"/>
           <a:lstStyle/>
           <a:p>
-            <a:pPr indent="0" marL="0">
+            <a:pPr eaLnBrk="0" algn="l" indent="0" marL="0">
               <a:lnSpc>
                 <a:spcPct val="105000"/>
               </a:lnSpc>
@@ -5294,7 +5294,7 @@
             </a:lvl1pPr>
           </a:lstStyle>
           <a:p>
-            <a:pPr algn="r"/>
+            <a:pPr eaLnBrk="0" algn="r"/>
             <a:fld id="{F7021451-1387-4CA6-816F-3879F97B5CBC}" type="slidenum">
               <a:rPr b="0" lang="en-US"/>
               <a:t>2</a:t>
@@ -5351,7 +5351,7 @@
           <a:bodyPr wrap="square" lIns="0" tIns="0" rIns="0" bIns="0" rtlCol="0" anchor="ctr"/>
           <a:lstStyle/>
           <a:p>
-            <a:pPr algn="l" indent="0" marL="0">
+            <a:pPr eaLnBrk="0" algn="l" indent="0" marL="0">
               <a:buNone/>
             </a:pPr>
             <a:r>
@@ -5417,7 +5417,7 @@
           <a:bodyPr wrap="square" lIns="0" tIns="0" rIns="0" bIns="0" rtlCol="0" anchor="ctr"/>
           <a:lstStyle/>
           <a:p>
-            <a:pPr indent="0" marL="0">
+            <a:pPr eaLnBrk="0" indent="0" marL="0">
               <a:spcAft>
                 <a:spcPts val="600"/>
               </a:spcAft>
@@ -5486,7 +5486,7 @@
           <a:bodyPr wrap="square" lIns="0" tIns="0" rIns="0" bIns="0" rtlCol="0" anchor="ctr"/>
           <a:lstStyle/>
           <a:p>
-            <a:pPr indent="0" marL="0">
+            <a:pPr eaLnBrk="0" indent="0" marL="0">
               <a:spcAft>
                 <a:spcPts val="600"/>
               </a:spcAft>
@@ -5506,7 +5506,7 @@
             <a:endParaRPr lang="ko-KR" sz="3000" dirty="0"/>
           </a:p>
           <a:p>
-            <a:pPr indent="0" marL="0">
+            <a:pPr eaLnBrk="0" indent="0" marL="0">
               <a:spcAft>
                 <a:spcPts val="600"/>
               </a:spcAft>
@@ -5575,7 +5575,7 @@
           <a:bodyPr wrap="square" lIns="0" tIns="0" rIns="0" bIns="0" rtlCol="0" anchor="ctr"/>
           <a:lstStyle/>
           <a:p>
-            <a:pPr indent="0" marL="0">
+            <a:pPr eaLnBrk="0" indent="0" marL="0">
               <a:spcAft>
                 <a:spcPts val="600"/>
               </a:spcAft>
@@ -5595,7 +5595,7 @@
             <a:endParaRPr lang="ko-KR" sz="3000" dirty="0"/>
           </a:p>
           <a:p>
-            <a:pPr indent="0" marL="0">
+            <a:pPr eaLnBrk="0" indent="0" marL="0">
               <a:spcAft>
                 <a:spcPts val="600"/>
               </a:spcAft>
@@ -5664,7 +5664,7 @@
           <a:bodyPr wrap="square" lIns="0" tIns="0" rIns="0" bIns="0" rtlCol="0" anchor="ctr"/>
           <a:lstStyle/>
           <a:p>
-            <a:pPr indent="0" marL="0">
+            <a:pPr eaLnBrk="0" indent="0" marL="0">
               <a:spcAft>
                 <a:spcPts val="600"/>
               </a:spcAft>
@@ -5684,7 +5684,7 @@
             <a:endParaRPr lang="ko-KR" sz="3000" dirty="0"/>
           </a:p>
           <a:p>
-            <a:pPr indent="0" marL="0">
+            <a:pPr eaLnBrk="0" indent="0" marL="0">
               <a:spcAft>
                 <a:spcPts val="600"/>
               </a:spcAft>
@@ -5744,7 +5744,7 @@
             </a:lvl1pPr>
           </a:lstStyle>
           <a:p>
-            <a:pPr algn="r"/>
+            <a:pPr eaLnBrk="0" algn="r"/>
             <a:fld id="{F7021451-1387-4CA6-816F-3879F97B5CBC}" type="slidenum">
               <a:rPr b="0" lang="en-US"/>
               <a:t>3</a:t>
@@ -5801,7 +5801,7 @@
           <a:bodyPr wrap="square" lIns="0" tIns="0" rIns="0" bIns="0" rtlCol="0" anchor="ctr"/>
           <a:lstStyle/>
           <a:p>
-            <a:pPr algn="l" indent="0" marL="0">
+            <a:pPr eaLnBrk="0" algn="l" indent="0" marL="0">
               <a:buNone/>
             </a:pPr>
             <a:r>
@@ -5867,7 +5867,7 @@
           <a:bodyPr wrap="square" lIns="0" tIns="0" rIns="0" bIns="0" rtlCol="0" anchor="ctr"/>
           <a:lstStyle/>
           <a:p>
-            <a:pPr indent="0" marL="0">
+            <a:pPr eaLnBrk="0" indent="0" marL="0">
               <a:spcAft>
                 <a:spcPts val="600"/>
               </a:spcAft>
@@ -5936,7 +5936,7 @@
           <a:bodyPr wrap="square" lIns="0" tIns="0" rIns="0" bIns="0" rtlCol="0" anchor="t"/>
           <a:lstStyle/>
           <a:p>
-            <a:pPr indent="0" marL="0">
+            <a:pPr eaLnBrk="0" algn="l" indent="0" marL="0">
               <a:lnSpc>
                 <a:spcPct val="105000"/>
               </a:lnSpc>
@@ -5999,7 +5999,7 @@
             </a:lvl1pPr>
           </a:lstStyle>
           <a:p>
-            <a:pPr algn="r"/>
+            <a:pPr eaLnBrk="0" algn="r"/>
             <a:fld id="{F7021451-1387-4CA6-816F-3879F97B5CBC}" type="slidenum">
               <a:rPr b="0" lang="en-US"/>
               <a:t>4</a:t>
@@ -6056,7 +6056,7 @@
           <a:bodyPr wrap="square" lIns="0" tIns="0" rIns="0" bIns="0" rtlCol="0" anchor="ctr"/>
           <a:lstStyle/>
           <a:p>
-            <a:pPr algn="l" indent="0" marL="0">
+            <a:pPr eaLnBrk="0" algn="l" indent="0" marL="0">
               <a:buNone/>
             </a:pPr>
             <a:r>
@@ -6101,7 +6101,7 @@
           <a:bodyPr wrap="square" lIns="0" tIns="0" rIns="0" bIns="0" rtlCol="0" anchor="ctr"/>
           <a:lstStyle/>
           <a:p>
-            <a:pPr algn="ctr" indent="0" marL="0">
+            <a:pPr eaLnBrk="0" algn="ctr" indent="0" marL="0">
               <a:buNone/>
             </a:pPr>
             <a:r>
@@ -6140,7 +6140,7 @@
           <a:bodyPr wrap="square" lIns="0" tIns="0" rIns="0" bIns="0" rtlCol="0" anchor="t"/>
           <a:lstStyle/>
           <a:p>
-            <a:pPr algn="l" indent="0" marL="0">
+            <a:pPr eaLnBrk="0" algn="l" indent="0" marL="0">
               <a:buNone/>
             </a:pPr>
             <a:r>
@@ -6185,7 +6185,7 @@
           <a:bodyPr wrap="square" lIns="0" tIns="0" rIns="0" bIns="0" rtlCol="0" anchor="ctr"/>
           <a:lstStyle/>
           <a:p>
-            <a:pPr algn="ctr" indent="0" marL="0">
+            <a:pPr eaLnBrk="0" algn="ctr" indent="0" marL="0">
               <a:buNone/>
             </a:pPr>
             <a:r>
@@ -6224,7 +6224,7 @@
           <a:bodyPr wrap="square" lIns="0" tIns="0" rIns="0" bIns="0" rtlCol="0" anchor="t"/>
           <a:lstStyle/>
           <a:p>
-            <a:pPr algn="l" indent="0" marL="0">
+            <a:pPr eaLnBrk="0" algn="l" indent="0" marL="0">
               <a:buNone/>
             </a:pPr>
             <a:r>
@@ -6269,7 +6269,7 @@
           <a:bodyPr wrap="square" lIns="0" tIns="0" rIns="0" bIns="0" rtlCol="0" anchor="ctr"/>
           <a:lstStyle/>
           <a:p>
-            <a:pPr algn="ctr" indent="0" marL="0">
+            <a:pPr eaLnBrk="0" algn="ctr" indent="0" marL="0">
               <a:buNone/>
             </a:pPr>
             <a:r>
@@ -6308,7 +6308,7 @@
           <a:bodyPr wrap="square" lIns="0" tIns="0" rIns="0" bIns="0" rtlCol="0" anchor="t"/>
           <a:lstStyle/>
           <a:p>
-            <a:pPr algn="l" indent="0" marL="0">
+            <a:pPr eaLnBrk="0" algn="l" indent="0" marL="0">
               <a:buNone/>
             </a:pPr>
             <a:r>
@@ -6353,7 +6353,7 @@
           <a:bodyPr wrap="square" lIns="0" tIns="0" rIns="0" bIns="0" rtlCol="0" anchor="ctr"/>
           <a:lstStyle/>
           <a:p>
-            <a:pPr algn="ctr" indent="0" marL="0">
+            <a:pPr eaLnBrk="0" algn="ctr" indent="0" marL="0">
               <a:buNone/>
             </a:pPr>
             <a:r>
@@ -6392,7 +6392,7 @@
           <a:bodyPr wrap="square" lIns="0" tIns="0" rIns="0" bIns="0" rtlCol="0" anchor="t"/>
           <a:lstStyle/>
           <a:p>
-            <a:pPr algn="l" indent="0" marL="0">
+            <a:pPr eaLnBrk="0" algn="l" indent="0" marL="0">
               <a:buNone/>
             </a:pPr>
             <a:r>
@@ -6437,7 +6437,7 @@
           <a:bodyPr wrap="square" lIns="0" tIns="0" rIns="0" bIns="0" rtlCol="0" anchor="ctr"/>
           <a:lstStyle/>
           <a:p>
-            <a:pPr algn="ctr" indent="0" marL="0">
+            <a:pPr eaLnBrk="0" algn="ctr" indent="0" marL="0">
               <a:buNone/>
             </a:pPr>
             <a:r>
@@ -6476,7 +6476,7 @@
           <a:bodyPr wrap="square" lIns="0" tIns="0" rIns="0" bIns="0" rtlCol="0" anchor="t"/>
           <a:lstStyle/>
           <a:p>
-            <a:pPr algn="l" indent="0" marL="0">
+            <a:pPr eaLnBrk="0" algn="l" indent="0" marL="0">
               <a:buNone/>
             </a:pPr>
             <a:r>
@@ -6533,7 +6533,7 @@
             </a:lvl1pPr>
           </a:lstStyle>
           <a:p>
-            <a:pPr algn="r"/>
+            <a:pPr eaLnBrk="0" algn="r"/>
             <a:fld id="{F7021451-1387-4CA6-816F-3879F97B5CBC}" type="slidenum">
               <a:rPr b="0" lang="en-US"/>
               <a:t>5</a:t>
@@ -6590,7 +6590,7 @@
           <a:bodyPr wrap="square" lIns="0" tIns="0" rIns="0" bIns="0" rtlCol="0" anchor="ctr"/>
           <a:lstStyle/>
           <a:p>
-            <a:pPr algn="l" indent="0" marL="0">
+            <a:pPr eaLnBrk="0" algn="l" indent="0" marL="0">
               <a:buNone/>
             </a:pPr>
             <a:r>
@@ -6656,7 +6656,7 @@
           <a:bodyPr wrap="square" lIns="0" tIns="0" rIns="0" bIns="0" rtlCol="0" anchor="ctr"/>
           <a:lstStyle/>
           <a:p>
-            <a:pPr indent="0" marL="0">
+            <a:pPr eaLnBrk="0" indent="0" marL="0">
               <a:spcAft>
                 <a:spcPts val="600"/>
               </a:spcAft>
@@ -6725,7 +6725,7 @@
           <a:bodyPr wrap="square" lIns="0" tIns="0" rIns="0" bIns="0" rtlCol="0" anchor="t"/>
           <a:lstStyle/>
           <a:p>
-            <a:pPr indent="0" marL="0">
+            <a:pPr eaLnBrk="0" algn="l" indent="0" marL="0">
               <a:lnSpc>
                 <a:spcPct val="105000"/>
               </a:lnSpc>
@@ -6788,7 +6788,7 @@
             </a:lvl1pPr>
           </a:lstStyle>
           <a:p>
-            <a:pPr algn="r"/>
+            <a:pPr eaLnBrk="0" algn="r"/>
             <a:fld id="{F7021451-1387-4CA6-816F-3879F97B5CBC}" type="slidenum">
               <a:rPr b="0" lang="en-US"/>
               <a:t>6</a:t>
@@ -6845,7 +6845,7 @@
           <a:bodyPr wrap="square" lIns="0" tIns="0" rIns="0" bIns="0" rtlCol="0" anchor="ctr"/>
           <a:lstStyle/>
           <a:p>
-            <a:pPr algn="l" indent="0" marL="0">
+            <a:pPr eaLnBrk="0" algn="l" indent="0" marL="0">
               <a:buNone/>
             </a:pPr>
             <a:r>
@@ -6911,7 +6911,7 @@
           <a:bodyPr wrap="square" lIns="0" tIns="0" rIns="0" bIns="0" rtlCol="0" anchor="ctr"/>
           <a:lstStyle/>
           <a:p>
-            <a:pPr indent="0" marL="0">
+            <a:pPr eaLnBrk="0" indent="0" marL="0">
               <a:spcAft>
                 <a:spcPts val="600"/>
               </a:spcAft>
@@ -6980,7 +6980,7 @@
           <a:bodyPr wrap="square" lIns="0" tIns="0" rIns="0" bIns="0" rtlCol="0" anchor="ctr"/>
           <a:lstStyle/>
           <a:p>
-            <a:pPr indent="0" marL="0">
+            <a:pPr eaLnBrk="0" indent="0" marL="0">
               <a:spcAft>
                 <a:spcPts val="600"/>
               </a:spcAft>
@@ -7030,7 +7030,7 @@
           <a:bodyPr wrap="square" lIns="177800" tIns="0" rIns="177800" bIns="0" rtlCol="0" anchor="ctr"/>
           <a:lstStyle/>
           <a:p>
-            <a:pPr algn="l" indent="0" marL="0">
+            <a:pPr eaLnBrk="0" algn="l" indent="0" marL="0">
               <a:buNone/>
             </a:pPr>
             <a:r>
@@ -7069,7 +7069,7 @@
           <a:bodyPr wrap="square" lIns="0" tIns="0" rIns="0" bIns="0" rtlCol="0" anchor="t"/>
           <a:lstStyle/>
           <a:p>
-            <a:pPr algn="l" indent="0" marL="0">
+            <a:pPr eaLnBrk="0" algn="l" indent="0" marL="0">
               <a:buNone/>
             </a:pPr>
             <a:r>
@@ -7116,7 +7116,7 @@
           <a:bodyPr wrap="square" lIns="177800" tIns="0" rIns="177800" bIns="0" rtlCol="0" anchor="ctr"/>
           <a:lstStyle/>
           <a:p>
-            <a:pPr algn="l" indent="0" marL="0">
+            <a:pPr eaLnBrk="0" algn="l" indent="0" marL="0">
               <a:buNone/>
             </a:pPr>
             <a:r>
@@ -7155,7 +7155,7 @@
           <a:bodyPr wrap="square" lIns="0" tIns="0" rIns="0" bIns="0" rtlCol="0" anchor="t"/>
           <a:lstStyle/>
           <a:p>
-            <a:pPr algn="l" indent="0" marL="0">
+            <a:pPr eaLnBrk="0" algn="l" indent="0" marL="0">
               <a:buNone/>
             </a:pPr>
             <a:r>
@@ -7212,7 +7212,7 @@
             </a:lvl1pPr>
           </a:lstStyle>
           <a:p>
-            <a:pPr algn="r"/>
+            <a:pPr eaLnBrk="0" algn="r"/>
             <a:fld id="{F7021451-1387-4CA6-816F-3879F97B5CBC}" type="slidenum">
               <a:rPr b="0" lang="en-US"/>
               <a:t>7</a:t>
@@ -7269,7 +7269,7 @@
           <a:bodyPr wrap="square" lIns="0" tIns="0" rIns="0" bIns="0" rtlCol="0" anchor="ctr"/>
           <a:lstStyle/>
           <a:p>
-            <a:pPr algn="l" indent="0" marL="0">
+            <a:pPr eaLnBrk="0" algn="l" indent="0" marL="0">
               <a:buNone/>
             </a:pPr>
             <a:r>
@@ -7308,7 +7308,7 @@
           <a:bodyPr wrap="square" lIns="0" tIns="0" rIns="0" bIns="0" rtlCol="0" anchor="ctr"/>
           <a:lstStyle/>
           <a:p>
-            <a:pPr algn="l" indent="0" marL="0">
+            <a:pPr eaLnBrk="0" algn="l" indent="0" marL="0">
               <a:buNone/>
             </a:pPr>
             <a:r>
@@ -7355,7 +7355,7 @@
           <a:bodyPr wrap="square" lIns="0" tIns="0" rIns="0" bIns="0" rtlCol="0" anchor="ctr"/>
           <a:lstStyle/>
           <a:p>
-            <a:pPr algn="ctr" indent="0" marL="0">
+            <a:pPr eaLnBrk="0" algn="ctr" indent="0" marL="0">
               <a:buNone/>
             </a:pPr>
             <a:r>
@@ -7394,7 +7394,7 @@
           <a:bodyPr wrap="square" lIns="0" tIns="0" rIns="0" bIns="0" rtlCol="0" anchor="ctr"/>
           <a:lstStyle/>
           <a:p>
-            <a:pPr algn="l" indent="0" marL="0">
+            <a:pPr eaLnBrk="0" algn="l" indent="0" marL="0">
               <a:buNone/>
             </a:pPr>
             <a:r>
@@ -7441,7 +7441,7 @@
           <a:bodyPr wrap="square" lIns="0" tIns="0" rIns="0" bIns="0" rtlCol="0" anchor="ctr"/>
           <a:lstStyle/>
           <a:p>
-            <a:pPr algn="ctr" indent="0" marL="0">
+            <a:pPr eaLnBrk="0" algn="ctr" indent="0" marL="0">
               <a:buNone/>
             </a:pPr>
             <a:r>
@@ -7480,7 +7480,7 @@
           <a:bodyPr wrap="square" lIns="0" tIns="0" rIns="0" bIns="0" rtlCol="0" anchor="ctr"/>
           <a:lstStyle/>
           <a:p>
-            <a:pPr algn="l" indent="0" marL="0">
+            <a:pPr eaLnBrk="0" algn="l" indent="0" marL="0">
               <a:buNone/>
             </a:pPr>
             <a:r>
@@ -7527,7 +7527,7 @@
           <a:bodyPr wrap="square" lIns="0" tIns="0" rIns="0" bIns="0" rtlCol="0" anchor="ctr"/>
           <a:lstStyle/>
           <a:p>
-            <a:pPr algn="ctr" indent="0" marL="0">
+            <a:pPr eaLnBrk="0" algn="ctr" indent="0" marL="0">
               <a:buNone/>
             </a:pPr>
             <a:r>
@@ -7566,7 +7566,7 @@
           <a:bodyPr wrap="square" lIns="0" tIns="0" rIns="0" bIns="0" rtlCol="0" anchor="ctr"/>
           <a:lstStyle/>
           <a:p>
-            <a:pPr algn="l" indent="0" marL="0">
+            <a:pPr eaLnBrk="0" algn="l" indent="0" marL="0">
               <a:buNone/>
             </a:pPr>
             <a:r>
@@ -7623,7 +7623,7 @@
             </a:lvl1pPr>
           </a:lstStyle>
           <a:p>
-            <a:pPr algn="r"/>
+            <a:pPr eaLnBrk="0" algn="r"/>
             <a:fld id="{F7021451-1387-4CA6-816F-3879F97B5CBC}" type="slidenum">
               <a:rPr b="0" lang="en-US"/>
               <a:t>8</a:t>
@@ -7680,7 +7680,7 @@
           <a:bodyPr wrap="square" lIns="0" tIns="0" rIns="0" bIns="0" rtlCol="0" anchor="ctr"/>
           <a:lstStyle/>
           <a:p>
-            <a:pPr algn="l" indent="0" marL="0">
+            <a:pPr eaLnBrk="0" algn="l" indent="0" marL="0">
               <a:buNone/>
             </a:pPr>
             <a:r>
@@ -7746,7 +7746,7 @@
           <a:bodyPr wrap="square" lIns="0" tIns="0" rIns="0" bIns="0" rtlCol="0" anchor="ctr"/>
           <a:lstStyle/>
           <a:p>
-            <a:pPr indent="0" marL="0">
+            <a:pPr eaLnBrk="0" indent="0" marL="0">
               <a:spcAft>
                 <a:spcPts val="600"/>
               </a:spcAft>
@@ -7815,7 +7815,7 @@
           <a:bodyPr wrap="square" lIns="0" tIns="0" rIns="0" bIns="0" rtlCol="0" anchor="t"/>
           <a:lstStyle/>
           <a:p>
-            <a:pPr indent="0" marL="0">
+            <a:pPr eaLnBrk="0" algn="l" indent="0" marL="0">
               <a:lnSpc>
                 <a:spcPct val="105000"/>
               </a:lnSpc>
@@ -7878,7 +7878,7 @@
             </a:lvl1pPr>
           </a:lstStyle>
           <a:p>
-            <a:pPr algn="r"/>
+            <a:pPr eaLnBrk="0" algn="r"/>
             <a:fld id="{F7021451-1387-4CA6-816F-3879F97B5CBC}" type="slidenum">
               <a:rPr b="0" lang="en-US"/>
               <a:t>9</a:t>

--- a/dist/초3/국어/읽기와어휘/초3_국어_읽기와어휘_02_문맥으로낱말뜻짐작.pptx
+++ b/dist/초3/국어/읽기와어휘/초3_국어_읽기와어휘_02_문맥으로낱말뜻짐작.pptx
@@ -119,39 +119,39 @@
   <p:extLst>
     <p:ext uri="{521415D9-36F7-43E2-AB2F-B90AF26B5E84}">
       <p14:sectionLst xmlns:p14="http://schemas.microsoft.com/office/powerpoint/2010/main">
-        <p14:section name="도입" id="{01d7395e-7bb2-f9db-1a06-b9e2f52cd3d6}">
+        <p14:section name="도입" id="{cd7e9bb4-f03a-20ca-340b-a31d54f134b0}">
           <p14:sldIdLst>
             <p14:sldId id="256"/>
             <p14:sldId id="257"/>
           </p14:sldIdLst>
         </p14:section>
-        <p14:section name="개념" id="{e220d3e2-aba3-8a9e-b7bb-a296de61aa68}">
+        <p14:section name="개념" id="{b0f0abf3-63dc-389e-c0f6-eac5d5ee625c}">
           <p14:sldIdLst>
             <p14:sldId id="258"/>
             <p14:sldId id="259"/>
             <p14:sldId id="260"/>
           </p14:sldIdLst>
         </p14:section>
-        <p14:section name="연습" id="{bd62f4c3-70ed-021a-fa0f-106f10df056c}">
+        <p14:section name="연습" id="{ea2cd744-b8f9-c440-3d47-6efc3b9e149c}">
           <p14:sldIdLst>
             <p14:sldId id="261"/>
             <p14:sldId id="262"/>
             <p14:sldId id="263"/>
           </p14:sldIdLst>
         </p14:section>
-        <p14:section name="확인" id="{74b3bba2-da74-7564-2fd4-6f49e3251c49}">
+        <p14:section name="확인" id="{11140356-5cf4-55f0-9605-66cc71f6f4b3}">
           <p14:sldIdLst>
             <p14:sldId id="264"/>
             <p14:sldId id="265"/>
             <p14:sldId id="266"/>
           </p14:sldIdLst>
         </p14:section>
-        <p14:section name="정리" id="{d5729d29-4d28-0ed8-8393-b60e16ca4928}">
+        <p14:section name="정리" id="{8f40fa9d-ec05-941c-285d-d9922f1473b6}">
           <p14:sldIdLst>
             <p14:sldId id="267"/>
           </p14:sldIdLst>
         </p14:section>
-        <p14:section name="보충" id="{40c3eb54-a6a7-de99-ca7f-48daac36b9d2}">
+        <p14:section name="보충" id="{8e1b5819-5c64-f728-03b0-75d64b38b2a5}">
           <p14:sldIdLst>
             <p14:sldId id="268"/>
           </p14:sldIdLst>
@@ -5122,12 +5122,12 @@
         </p:nvSpPr>
         <p:spPr>
           <a:xfrm>
-            <a:off x="548640" y="5349240"/>
-            <a:ext cx="11091672" cy="868680"/>
+            <a:off x="548640" y="4959096"/>
+            <a:ext cx="11091672" cy="1258824"/>
           </a:xfrm>
           <a:prstGeom prst="roundRect">
             <a:avLst>
-              <a:gd name="adj" fmla="val 12632"/>
+              <a:gd name="adj" fmla="val 8717"/>
             </a:avLst>
           </a:prstGeom>
           <a:solidFill>
@@ -5149,8 +5149,8 @@
         </p:nvSpPr>
         <p:spPr>
           <a:xfrm>
-            <a:off x="822960" y="5486400"/>
-            <a:ext cx="10543032" cy="594360"/>
+            <a:off x="822960" y="5096256"/>
+            <a:ext cx="10543032" cy="984504"/>
           </a:xfrm>
           <a:prstGeom prst="rect">
             <a:avLst/>
@@ -5192,11 +5192,11 @@
         <p:spPr>
           <a:xfrm>
             <a:off x="548640" y="1325880"/>
-            <a:ext cx="11091672" cy="3794760"/>
+            <a:ext cx="11091672" cy="3404616"/>
           </a:xfrm>
           <a:prstGeom prst="roundRect">
             <a:avLst>
-              <a:gd name="adj" fmla="val 2410"/>
+              <a:gd name="adj" fmla="val 2686"/>
             </a:avLst>
           </a:prstGeom>
           <a:solidFill>
@@ -5219,7 +5219,7 @@
         <p:spPr>
           <a:xfrm>
             <a:off x="822960" y="1508760"/>
-            <a:ext cx="10543032" cy="3429000"/>
+            <a:ext cx="10543032" cy="3038856"/>
           </a:xfrm>
           <a:prstGeom prst="rect">
             <a:avLst/>
